--- a/examples/output/pptx/03-template.pptx
+++ b/examples/output/pptx/03-template.pptx
@@ -2,8 +2,8 @@
 <file path=ppt/presentation.xml><?xml version="1.0" encoding="utf-8"?>
 <p:presentation xmlns:r="http://schemas.openxmlformats.org/officeDocument/2006/relationships" xmlns:p="http://schemas.openxmlformats.org/presentationml/2006/main">
   <p:sldIdLst>
-    <p:sldId xmlns:r="http://schemas.openxmlformats.org/officeDocument/2006/relationships" id="257" r:id="R2b6707ca00e941f2"/>
-    <p:sldId xmlns:r="http://schemas.openxmlformats.org/officeDocument/2006/relationships" id="258" r:id="R0e7ba70c569f4642"/>
+    <p:sldId xmlns:r="http://schemas.openxmlformats.org/officeDocument/2006/relationships" id="257" r:id="R2ad59c1364954c5c"/>
+    <p:sldId xmlns:r="http://schemas.openxmlformats.org/officeDocument/2006/relationships" id="258" r:id="Ree7fa4e9cf024888"/>
   </p:sldIdLst>
 </p:presentation>
 </file>
@@ -58,7 +58,7 @@
   </p:cSld>
   <p:clrMap/>
   <p:sldLayoutIdLst>
-    <p:sldLayoutId xmlns:r="http://schemas.openxmlformats.org/officeDocument/2006/relationships" id="1" r:id="R7c1d1a0f50844664"/>
+    <p:sldLayoutId xmlns:r="http://schemas.openxmlformats.org/officeDocument/2006/relationships" id="1" r:id="R6b5378ed255c4f44"/>
   </p:sldLayoutIdLst>
 </p:sldMaster>
 </file>
